--- a/Documentation/Поток_Презентация.pptx
+++ b/Documentation/Поток_Презентация.pptx
@@ -5,18 +5,18 @@
     <p:sldMasterId id="2147483660" r:id="rId1"/>
   </p:sldMasterIdLst>
   <p:sldIdLst>
-    <p:sldId id="258" r:id="rId2"/>
-    <p:sldId id="260" r:id="rId3"/>
-    <p:sldId id="262" r:id="rId4"/>
-    <p:sldId id="264" r:id="rId5"/>
+    <p:sldId id="277" r:id="rId2"/>
+    <p:sldId id="285" r:id="rId3"/>
+    <p:sldId id="279" r:id="rId4"/>
+    <p:sldId id="280" r:id="rId5"/>
     <p:sldId id="265" r:id="rId6"/>
-    <p:sldId id="266" r:id="rId7"/>
+    <p:sldId id="281" r:id="rId7"/>
     <p:sldId id="267" r:id="rId8"/>
-    <p:sldId id="269" r:id="rId9"/>
+    <p:sldId id="282" r:id="rId9"/>
     <p:sldId id="270" r:id="rId10"/>
     <p:sldId id="272" r:id="rId11"/>
-    <p:sldId id="274" r:id="rId12"/>
-    <p:sldId id="276" r:id="rId13"/>
+    <p:sldId id="283" r:id="rId12"/>
+    <p:sldId id="284" r:id="rId13"/>
   </p:sldIdLst>
   <p:sldSz cx="12192000" cy="6858000"/>
   <p:notesSz cx="6858000" cy="9144000"/>
@@ -115,6 +115,11 @@
       </a:defRPr>
     </a:lvl9pPr>
   </p:defaultTextStyle>
+  <p:extLst>
+    <p:ext uri="{EFAFB233-063F-42B5-8137-9DF3F51BA10A}">
+      <p15:sldGuideLst xmlns:p15="http://schemas.microsoft.com/office/powerpoint/2012/main"/>
+    </p:ext>
+  </p:extLst>
 </p:presentation>
 </file>
 
@@ -265,7 +270,7 @@
           <a:p>
             <a:fld id="{E07F2287-3710-46D9-BD05-095C6C81A543}" type="datetimeFigureOut">
               <a:rPr lang="ru-RU" smtClean="0"/>
-              <a:t>14.05.2026</a:t>
+              <a:t>15.05.2026</a:t>
             </a:fld>
             <a:endParaRPr lang="ru-RU"/>
           </a:p>
@@ -463,7 +468,7 @@
           <a:p>
             <a:fld id="{E07F2287-3710-46D9-BD05-095C6C81A543}" type="datetimeFigureOut">
               <a:rPr lang="ru-RU" smtClean="0"/>
-              <a:t>14.05.2026</a:t>
+              <a:t>15.05.2026</a:t>
             </a:fld>
             <a:endParaRPr lang="ru-RU"/>
           </a:p>
@@ -671,7 +676,7 @@
           <a:p>
             <a:fld id="{E07F2287-3710-46D9-BD05-095C6C81A543}" type="datetimeFigureOut">
               <a:rPr lang="ru-RU" smtClean="0"/>
-              <a:t>14.05.2026</a:t>
+              <a:t>15.05.2026</a:t>
             </a:fld>
             <a:endParaRPr lang="ru-RU"/>
           </a:p>
@@ -869,7 +874,7 @@
           <a:p>
             <a:fld id="{E07F2287-3710-46D9-BD05-095C6C81A543}" type="datetimeFigureOut">
               <a:rPr lang="ru-RU" smtClean="0"/>
-              <a:t>14.05.2026</a:t>
+              <a:t>15.05.2026</a:t>
             </a:fld>
             <a:endParaRPr lang="ru-RU"/>
           </a:p>
@@ -1144,7 +1149,7 @@
           <a:p>
             <a:fld id="{E07F2287-3710-46D9-BD05-095C6C81A543}" type="datetimeFigureOut">
               <a:rPr lang="ru-RU" smtClean="0"/>
-              <a:t>14.05.2026</a:t>
+              <a:t>15.05.2026</a:t>
             </a:fld>
             <a:endParaRPr lang="ru-RU"/>
           </a:p>
@@ -1409,7 +1414,7 @@
           <a:p>
             <a:fld id="{E07F2287-3710-46D9-BD05-095C6C81A543}" type="datetimeFigureOut">
               <a:rPr lang="ru-RU" smtClean="0"/>
-              <a:t>14.05.2026</a:t>
+              <a:t>15.05.2026</a:t>
             </a:fld>
             <a:endParaRPr lang="ru-RU"/>
           </a:p>
@@ -1821,7 +1826,7 @@
           <a:p>
             <a:fld id="{E07F2287-3710-46D9-BD05-095C6C81A543}" type="datetimeFigureOut">
               <a:rPr lang="ru-RU" smtClean="0"/>
-              <a:t>14.05.2026</a:t>
+              <a:t>15.05.2026</a:t>
             </a:fld>
             <a:endParaRPr lang="ru-RU"/>
           </a:p>
@@ -1962,7 +1967,7 @@
           <a:p>
             <a:fld id="{E07F2287-3710-46D9-BD05-095C6C81A543}" type="datetimeFigureOut">
               <a:rPr lang="ru-RU" smtClean="0"/>
-              <a:t>14.05.2026</a:t>
+              <a:t>15.05.2026</a:t>
             </a:fld>
             <a:endParaRPr lang="ru-RU"/>
           </a:p>
@@ -2075,7 +2080,7 @@
           <a:p>
             <a:fld id="{E07F2287-3710-46D9-BD05-095C6C81A543}" type="datetimeFigureOut">
               <a:rPr lang="ru-RU" smtClean="0"/>
-              <a:t>14.05.2026</a:t>
+              <a:t>15.05.2026</a:t>
             </a:fld>
             <a:endParaRPr lang="ru-RU"/>
           </a:p>
@@ -2386,7 +2391,7 @@
           <a:p>
             <a:fld id="{E07F2287-3710-46D9-BD05-095C6C81A543}" type="datetimeFigureOut">
               <a:rPr lang="ru-RU" smtClean="0"/>
-              <a:t>14.05.2026</a:t>
+              <a:t>15.05.2026</a:t>
             </a:fld>
             <a:endParaRPr lang="ru-RU"/>
           </a:p>
@@ -2674,7 +2679,7 @@
           <a:p>
             <a:fld id="{E07F2287-3710-46D9-BD05-095C6C81A543}" type="datetimeFigureOut">
               <a:rPr lang="ru-RU" smtClean="0"/>
-              <a:t>14.05.2026</a:t>
+              <a:t>15.05.2026</a:t>
             </a:fld>
             <a:endParaRPr lang="ru-RU"/>
           </a:p>
@@ -2918,7 +2923,7 @@
           <a:p>
             <a:fld id="{E07F2287-3710-46D9-BD05-095C6C81A543}" type="datetimeFigureOut">
               <a:rPr lang="ru-RU" smtClean="0"/>
-              <a:t>14.05.2026</a:t>
+              <a:t>15.05.2026</a:t>
             </a:fld>
             <a:endParaRPr lang="ru-RU"/>
           </a:p>
@@ -3395,7 +3400,7 @@
                 </a:solidFill>
                 <a:latin typeface="Cambria"/>
               </a:rPr>
-              <a:t>ControlFlow</a:t>
+              <a:t>Поток</a:t>
             </a:r>
           </a:p>
           <a:p>
@@ -3445,7 +3450,7 @@
                 </a:solidFill>
                 <a:latin typeface="Calibri"/>
               </a:rPr>
-              <a:t>Выпускная квалификационная работа</a:t>
+              <a:t>Выполнил студент группы 41П, </a:t>
             </a:r>
           </a:p>
           <a:p>
@@ -3453,13 +3458,22 @@
               <a:buNone/>
             </a:pPr>
             <a:r>
+              <a:rPr lang="ru-RU" sz="1600" dirty="0" err="1">
+                <a:solidFill>
+                  <a:srgbClr val="636E80"/>
+                </a:solidFill>
+                <a:latin typeface="Calibri"/>
+              </a:rPr>
+              <a:t>Шеронов</a:t>
+            </a:r>
+            <a:r>
               <a:rPr lang="ru-RU" sz="1600" dirty="0">
                 <a:solidFill>
                   <a:srgbClr val="636E80"/>
                 </a:solidFill>
                 <a:latin typeface="Calibri"/>
               </a:rPr>
-              <a:t>Автор: dizzy-166 · 2026</a:t>
+              <a:t> Д.С.</a:t>
             </a:r>
           </a:p>
         </p:txBody>
@@ -3467,7 +3481,7 @@
     </p:spTree>
     <p:extLst>
       <p:ext uri="{BB962C8B-B14F-4D97-AF65-F5344CB8AC3E}">
-        <p14:creationId xmlns:p14="http://schemas.microsoft.com/office/powerpoint/2010/main" val="3993248972"/>
+        <p14:creationId xmlns:p14="http://schemas.microsoft.com/office/powerpoint/2010/main" val="3852503143"/>
       </p:ext>
     </p:extLst>
   </p:cSld>
@@ -3698,7 +3712,7 @@
                 </a:solidFill>
                 <a:latin typeface="Calibri"/>
               </a:rPr>
-              <a:t>Реализовано полнофункциональное SPA-приложение: 5 модулей (users, companies, tasks, activity, chat) и более 30 REST-эндпоинтов</a:t>
+              <a:t>Реализовано полнофункциональное одностраничное веб-приложение: 5 модулей (users, companies, tasks, activity, chat) и более 30 точек REST API</a:t>
             </a:r>
           </a:p>
           <a:p>
@@ -3719,7 +3733,7 @@
                 </a:solidFill>
                 <a:latin typeface="Calibri"/>
               </a:rPr>
-              <a:t>Три представления задач — Kanban с drag-and-drop, табличный список, диаграмма Ганта</a:t>
+              <a:t>Три представления задач — Kanban с перетаскиванием карточек, табличный список, диаграмма Ганта</a:t>
             </a:r>
           </a:p>
           <a:p>
@@ -3740,7 +3754,7 @@
                 </a:solidFill>
                 <a:latin typeface="Calibri"/>
               </a:rPr>
-              <a:t>Гибкая ролевая модель: три встроенные роли и кастомные роли с настройкой прав</a:t>
+              <a:t>Гибкая ролевая модель: три встроенные роли и настраиваемые роли с настройкой прав</a:t>
             </a:r>
           </a:p>
           <a:p>
@@ -3782,7 +3796,7 @@
                 </a:solidFill>
                 <a:latin typeface="Calibri"/>
               </a:rPr>
-              <a:t>Развёртывание в production: бэкенд на Render + PostgreSQL, фронтенд на Vercel, доступен по публичному URL</a:t>
+              <a:t>Развёртывание в production: серверная часть на Render + PostgreSQL, клиентская часть на Vercel, доступна по публичному URL</a:t>
             </a:r>
           </a:p>
           <a:p>
@@ -3803,7 +3817,7 @@
                 </a:solidFill>
                 <a:latin typeface="Calibri"/>
               </a:rPr>
-              <a:t>Автоматическая документация OpenAPI / Swagger-UI для всех эндпоинтов API</a:t>
+              <a:t>Автоматическая документация OpenAPI / Swagger-UI для всех точек API</a:t>
             </a:r>
           </a:p>
         </p:txBody>
@@ -3811,7 +3825,7 @@
     </p:spTree>
     <p:extLst>
       <p:ext uri="{BB962C8B-B14F-4D97-AF65-F5344CB8AC3E}">
-        <p14:creationId xmlns:p14="http://schemas.microsoft.com/office/powerpoint/2010/main" val="1347383468"/>
+        <p14:creationId xmlns:p14="http://schemas.microsoft.com/office/powerpoint/2010/main" val="2623910421"/>
       </p:ext>
     </p:extLst>
   </p:cSld>
@@ -3950,7 +3964,7 @@
                 </a:solidFill>
                 <a:latin typeface="Calibri"/>
               </a:rPr>
-              <a:t>Спроектирована ролевая модель с мультитенантностью и кастомными правами</a:t>
+              <a:t>Спроектирована ролевая модель с работой в нескольких компаниях и настраиваемыми правами</a:t>
             </a:r>
           </a:p>
           <a:p>
@@ -4038,7 +4052,7 @@
     </p:spTree>
     <p:extLst>
       <p:ext uri="{BB962C8B-B14F-4D97-AF65-F5344CB8AC3E}">
-        <p14:creationId xmlns:p14="http://schemas.microsoft.com/office/powerpoint/2010/main" val="3413689590"/>
+        <p14:creationId xmlns:p14="http://schemas.microsoft.com/office/powerpoint/2010/main" val="817866081"/>
       </p:ext>
     </p:extLst>
   </p:cSld>
@@ -4160,7 +4174,7 @@
                 </a:solidFill>
                 <a:latin typeface="Calibri"/>
               </a:rPr>
-              <a:t>Существующие решения часто либо избыточны и дороги (Jira, Asana), либо лишены гибкой ролевой модели</a:t>
+              <a:t>Существующие решения часто либо избыточны и дороги, либо лишены гибкой ролевой модели</a:t>
             </a:r>
           </a:p>
           <a:p>
@@ -4181,7 +4195,7 @@
                 </a:solidFill>
                 <a:latin typeface="Calibri"/>
               </a:rPr>
-              <a:t>Высокая нагрузка на руководителей при ручной декомпозиции крупных задач — нужна автоматизация</a:t>
+              <a:t>Высокая нагрузка на руководителей при ручном разделении крупных задач — нужна автоматизация</a:t>
             </a:r>
           </a:p>
           <a:p>
@@ -4202,7 +4216,7 @@
                 </a:solidFill>
                 <a:latin typeface="Calibri"/>
               </a:rPr>
-              <a:t>Малому и среднему бизнесу нужна доступная корпоративная среда с мультитенантностью и кастомными ролями</a:t>
+              <a:t>Малому и среднему бизнесу нужна доступная корпоративная среда с поддержкой нескольких компаний и настраиваемыми ролями</a:t>
             </a:r>
           </a:p>
         </p:txBody>
@@ -4210,7 +4224,7 @@
     </p:spTree>
     <p:extLst>
       <p:ext uri="{BB962C8B-B14F-4D97-AF65-F5344CB8AC3E}">
-        <p14:creationId xmlns:p14="http://schemas.microsoft.com/office/powerpoint/2010/main" val="437044668"/>
+        <p14:creationId xmlns:p14="http://schemas.microsoft.com/office/powerpoint/2010/main" val="2409439000"/>
       </p:ext>
     </p:extLst>
   </p:cSld>
@@ -4366,7 +4380,7 @@
                 </a:solidFill>
                 <a:latin typeface="Calibri"/>
               </a:rPr>
-              <a:t>Спроектировать модель данных с поддержкой мультитенантности и ролей</a:t>
+              <a:t>Спроектировать модель данных с поддержкой работы в нескольких компаниях и ролей</a:t>
             </a:r>
           </a:p>
           <a:p>
@@ -4408,7 +4422,7 @@
                 </a:solidFill>
                 <a:latin typeface="Calibri"/>
               </a:rPr>
-              <a:t>Разработать SPA-интерфейс на React 19 с Kanban, списком и диаграммой Ганта</a:t>
+              <a:t>Разработать одностраничный интерфейс на React 19 с Kanban, списком и диаграммой Ганта</a:t>
             </a:r>
           </a:p>
           <a:p>
@@ -4458,7 +4472,7 @@
     </p:spTree>
     <p:extLst>
       <p:ext uri="{BB962C8B-B14F-4D97-AF65-F5344CB8AC3E}">
-        <p14:creationId xmlns:p14="http://schemas.microsoft.com/office/powerpoint/2010/main" val="1450310857"/>
+        <p14:creationId xmlns:p14="http://schemas.microsoft.com/office/powerpoint/2010/main" val="746249387"/>
       </p:ext>
     </p:extLst>
   </p:cSld>
@@ -4579,7 +4593,7 @@
                 </a:solidFill>
                 <a:latin typeface="Calibri"/>
               </a:rPr>
-              <a:t>Канбан-доска с drag-and-drop</a:t>
+              <a:t>Канбан-доска с перетаскиванием карточек</a:t>
             </a:r>
           </a:p>
           <a:p>
@@ -4726,7 +4740,7 @@
                 </a:solidFill>
                 <a:latin typeface="Calibri"/>
               </a:rPr>
-              <a:t>Мультитенантность — компании</a:t>
+              <a:t>Работа в нескольких компаниях</a:t>
             </a:r>
           </a:p>
           <a:p>
@@ -4747,7 +4761,7 @@
                 </a:solidFill>
                 <a:latin typeface="Calibri"/>
               </a:rPr>
-              <a:t>Роли Owner / Admin / Member и кастомные</a:t>
+              <a:t>Роли Owner / Admin / Member и настраиваемые</a:t>
             </a:r>
           </a:p>
           <a:p>
@@ -4818,7 +4832,7 @@
     </p:spTree>
     <p:extLst>
       <p:ext uri="{BB962C8B-B14F-4D97-AF65-F5344CB8AC3E}">
-        <p14:creationId xmlns:p14="http://schemas.microsoft.com/office/powerpoint/2010/main" val="1813162234"/>
+        <p14:creationId xmlns:p14="http://schemas.microsoft.com/office/powerpoint/2010/main" val="1104981636"/>
       </p:ext>
     </p:extLst>
   </p:cSld>
@@ -6159,7 +6173,7 @@
           <p:nvPr>
             <p:extLst>
               <p:ext uri="{D42A27DB-BD31-4B8C-83A1-F6EECF244321}">
-                <p14:modId xmlns:p14="http://schemas.microsoft.com/office/powerpoint/2010/main" val="2018012851"/>
+                <p14:modId xmlns:p14="http://schemas.microsoft.com/office/powerpoint/2010/main" val="1987845161"/>
               </p:ext>
             </p:extLst>
           </p:nvPr>
@@ -6295,7 +6309,7 @@
                           <a:ea typeface="Calibri"/>
                           <a:cs typeface="Calibri"/>
                         </a:rPr>
-                        <a:t>Бэкенд</a:t>
+                        <a:t>Серверная часть</a:t>
                       </a:r>
                     </a:p>
                   </a:txBody>
@@ -6517,7 +6531,7 @@
                           <a:ea typeface="Calibri"/>
                           <a:cs typeface="Calibri"/>
                         </a:rPr>
-                        <a:t>Фронтенд</a:t>
+                        <a:t>Клиентская часть</a:t>
                       </a:r>
                     </a:p>
                   </a:txBody>
@@ -6567,7 +6581,7 @@
                           <a:ea typeface="Calibri"/>
                           <a:cs typeface="Calibri"/>
                         </a:rPr>
-                        <a:t>SPA-интерфейс, маршрутизация</a:t>
+                        <a:t>Одностраничный интерфейс, маршрутизация</a:t>
                       </a:r>
                     </a:p>
                   </a:txBody>
@@ -6641,7 +6655,7 @@
                           <a:ea typeface="Calibri"/>
                           <a:cs typeface="Calibri"/>
                         </a:rPr>
-                        <a:t>Локальный стор и запросы к API</a:t>
+                        <a:t>Локальный стор и запросы к серверу</a:t>
                       </a:r>
                     </a:p>
                   </a:txBody>
@@ -6894,7 +6908,7 @@
     </p:spTree>
     <p:extLst>
       <p:ext uri="{BB962C8B-B14F-4D97-AF65-F5344CB8AC3E}">
-        <p14:creationId xmlns:p14="http://schemas.microsoft.com/office/powerpoint/2010/main" val="1691605375"/>
+        <p14:creationId xmlns:p14="http://schemas.microsoft.com/office/powerpoint/2010/main" val="2026280586"/>
       </p:ext>
     </p:extLst>
   </p:cSld>
@@ -6968,7 +6982,7 @@
         </p:nvSpPr>
         <p:spPr>
           <a:xfrm>
-            <a:off x="381000" y="1651000"/>
+            <a:off x="381000" y="1905000"/>
             <a:ext cx="2222500" cy="1206500"/>
           </a:xfrm>
           <a:prstGeom prst="rect">
@@ -7024,7 +7038,7 @@
         </p:nvSpPr>
         <p:spPr>
           <a:xfrm>
-            <a:off x="381000" y="1651000"/>
+            <a:off x="381000" y="1905000"/>
             <a:ext cx="2222500" cy="304800"/>
           </a:xfrm>
           <a:prstGeom prst="rect">
@@ -7098,7 +7112,7 @@
         </p:nvSpPr>
         <p:spPr>
           <a:xfrm>
-            <a:off x="457200" y="1981200"/>
+            <a:off x="457200" y="2235200"/>
             <a:ext cx="2070100" cy="850900"/>
           </a:xfrm>
           <a:prstGeom prst="rect">
@@ -7155,7 +7169,7 @@
         </p:nvSpPr>
         <p:spPr>
           <a:xfrm>
-            <a:off x="5016500" y="1651000"/>
+            <a:off x="5016500" y="1905000"/>
             <a:ext cx="2222500" cy="1206500"/>
           </a:xfrm>
           <a:prstGeom prst="rect">
@@ -7211,7 +7225,7 @@
         </p:nvSpPr>
         <p:spPr>
           <a:xfrm>
-            <a:off x="5016500" y="1651000"/>
+            <a:off x="5016500" y="1905000"/>
             <a:ext cx="2222500" cy="304800"/>
           </a:xfrm>
           <a:prstGeom prst="rect">
@@ -7285,7 +7299,7 @@
         </p:nvSpPr>
         <p:spPr>
           <a:xfrm>
-            <a:off x="5092700" y="1981200"/>
+            <a:off x="5092700" y="2235200"/>
             <a:ext cx="2070100" cy="850900"/>
           </a:xfrm>
           <a:prstGeom prst="rect">
@@ -7342,7 +7356,7 @@
         </p:nvSpPr>
         <p:spPr>
           <a:xfrm>
-            <a:off x="9588500" y="1651000"/>
+            <a:off x="9588500" y="1905000"/>
             <a:ext cx="2222500" cy="1206500"/>
           </a:xfrm>
           <a:prstGeom prst="rect">
@@ -7398,7 +7412,7 @@
         </p:nvSpPr>
         <p:spPr>
           <a:xfrm>
-            <a:off x="9588500" y="1651000"/>
+            <a:off x="9588500" y="1905000"/>
             <a:ext cx="2222500" cy="304800"/>
           </a:xfrm>
           <a:prstGeom prst="rect">
@@ -7472,7 +7486,7 @@
         </p:nvSpPr>
         <p:spPr>
           <a:xfrm>
-            <a:off x="9664700" y="1981200"/>
+            <a:off x="9664700" y="2235200"/>
             <a:ext cx="2070100" cy="850900"/>
           </a:xfrm>
           <a:prstGeom prst="rect">
@@ -7529,7 +7543,7 @@
         </p:nvSpPr>
         <p:spPr>
           <a:xfrm>
-            <a:off x="381000" y="3429000"/>
+            <a:off x="381000" y="3683000"/>
             <a:ext cx="2222500" cy="1206500"/>
           </a:xfrm>
           <a:prstGeom prst="rect">
@@ -7585,7 +7599,7 @@
         </p:nvSpPr>
         <p:spPr>
           <a:xfrm>
-            <a:off x="381000" y="3429000"/>
+            <a:off x="381000" y="3683000"/>
             <a:ext cx="2222500" cy="304800"/>
           </a:xfrm>
           <a:prstGeom prst="rect">
@@ -7659,7 +7673,7 @@
         </p:nvSpPr>
         <p:spPr>
           <a:xfrm>
-            <a:off x="457200" y="3759200"/>
+            <a:off x="457200" y="4013200"/>
             <a:ext cx="2070100" cy="850900"/>
           </a:xfrm>
           <a:prstGeom prst="rect">
@@ -7716,7 +7730,7 @@
         </p:nvSpPr>
         <p:spPr>
           <a:xfrm>
-            <a:off x="2692400" y="3429000"/>
+            <a:off x="2692400" y="3683000"/>
             <a:ext cx="2222500" cy="1397000"/>
           </a:xfrm>
           <a:prstGeom prst="rect">
@@ -7772,7 +7786,7 @@
         </p:nvSpPr>
         <p:spPr>
           <a:xfrm>
-            <a:off x="2692400" y="3429000"/>
+            <a:off x="2692400" y="3683000"/>
             <a:ext cx="2222500" cy="304800"/>
           </a:xfrm>
           <a:prstGeom prst="rect">
@@ -7846,7 +7860,7 @@
         </p:nvSpPr>
         <p:spPr>
           <a:xfrm>
-            <a:off x="2768600" y="3759200"/>
+            <a:off x="2768600" y="4013200"/>
             <a:ext cx="2070100" cy="1041400"/>
           </a:xfrm>
           <a:prstGeom prst="rect">
@@ -7903,7 +7917,7 @@
         </p:nvSpPr>
         <p:spPr>
           <a:xfrm>
-            <a:off x="5016500" y="3429000"/>
+            <a:off x="5016500" y="3683000"/>
             <a:ext cx="2222500" cy="1397000"/>
           </a:xfrm>
           <a:prstGeom prst="rect">
@@ -7959,7 +7973,7 @@
         </p:nvSpPr>
         <p:spPr>
           <a:xfrm>
-            <a:off x="5016500" y="3429000"/>
+            <a:off x="5016500" y="3683000"/>
             <a:ext cx="2222500" cy="304800"/>
           </a:xfrm>
           <a:prstGeom prst="rect">
@@ -8033,7 +8047,7 @@
         </p:nvSpPr>
         <p:spPr>
           <a:xfrm>
-            <a:off x="5092700" y="3759200"/>
+            <a:off x="5092700" y="4013200"/>
             <a:ext cx="2070100" cy="1041400"/>
           </a:xfrm>
           <a:prstGeom prst="rect">
@@ -8090,7 +8104,7 @@
         </p:nvSpPr>
         <p:spPr>
           <a:xfrm>
-            <a:off x="7327900" y="3429000"/>
+            <a:off x="7327900" y="3683000"/>
             <a:ext cx="2222500" cy="1206500"/>
           </a:xfrm>
           <a:prstGeom prst="rect">
@@ -8146,7 +8160,7 @@
         </p:nvSpPr>
         <p:spPr>
           <a:xfrm>
-            <a:off x="7327900" y="3429000"/>
+            <a:off x="7327900" y="3683000"/>
             <a:ext cx="2222500" cy="304800"/>
           </a:xfrm>
           <a:prstGeom prst="rect">
@@ -8220,7 +8234,7 @@
         </p:nvSpPr>
         <p:spPr>
           <a:xfrm>
-            <a:off x="7404100" y="3759200"/>
+            <a:off x="7404100" y="4013200"/>
             <a:ext cx="2070100" cy="850900"/>
           </a:xfrm>
           <a:prstGeom prst="rect">
@@ -8276,7 +8290,7 @@
         </p:nvSpPr>
         <p:spPr>
           <a:xfrm>
-            <a:off x="9588500" y="3429000"/>
+            <a:off x="9588500" y="3683000"/>
             <a:ext cx="2222500" cy="1206500"/>
           </a:xfrm>
           <a:prstGeom prst="rect">
@@ -8332,7 +8346,7 @@
         </p:nvSpPr>
         <p:spPr>
           <a:xfrm>
-            <a:off x="9588500" y="3429000"/>
+            <a:off x="9588500" y="3683000"/>
             <a:ext cx="2222500" cy="304800"/>
           </a:xfrm>
           <a:prstGeom prst="rect">
@@ -8406,7 +8420,7 @@
         </p:nvSpPr>
         <p:spPr>
           <a:xfrm>
-            <a:off x="9664700" y="3759200"/>
+            <a:off x="9664700" y="4013200"/>
             <a:ext cx="2070100" cy="850900"/>
           </a:xfrm>
           <a:prstGeom prst="rect">
@@ -8448,12 +8462,66 @@
           </a:p>
         </p:txBody>
       </p:sp>
+      <p:sp>
+        <p:nvSpPr>
+          <p:cNvPr id="35" name="TextBox 34">
+            <a:extLst>
+              <a:ext uri="{FF2B5EF4-FFF2-40B4-BE49-F238E27FC236}">
+                <a16:creationId xmlns:a16="http://schemas.microsoft.com/office/drawing/2014/main" id="{6315EC14-10AB-433B-98C9-F40C976AB17A}"/>
+              </a:ext>
+            </a:extLst>
+          </p:cNvPr>
+          <p:cNvSpPr txBox="1"/>
+          <p:nvPr/>
+        </p:nvSpPr>
+        <p:spPr>
+          <a:xfrm>
+            <a:off x="381000" y="6096000"/>
+            <a:ext cx="11430000" cy="304800"/>
+          </a:xfrm>
+          <a:prstGeom prst="rect">
+            <a:avLst/>
+          </a:prstGeom>
+          <a:noFill/>
+          <a:ln>
+            <a:noFill/>
+          </a:ln>
+        </p:spPr>
+        <p:txBody>
+          <a:bodyPr vertOverflow="overflow" vert="horz" wrap="square" rtlCol="0" anchor="t">
+            <a:noAutofit/>
+          </a:bodyPr>
+          <a:lstStyle/>
+          <a:p>
+            <a:pPr algn="l"/>
+            <a:r>
+              <a:rPr lang="en-US" sz="1200" i="1">
+                <a:solidFill>
+                  <a:srgbClr val="636E80"/>
+                </a:solidFill>
+                <a:latin typeface="Calibri"/>
+                <a:ea typeface="Calibri"/>
+                <a:cs typeface="Calibri"/>
+              </a:rPr>
+              <a:t>Сущности из приложений users · companies · tasks · chat · activity</a:t>
+            </a:r>
+            <a:endParaRPr lang="ru-RU" sz="1200" i="1">
+              <a:solidFill>
+                <a:srgbClr val="636E80"/>
+              </a:solidFill>
+              <a:latin typeface="Calibri"/>
+              <a:ea typeface="Calibri"/>
+              <a:cs typeface="Calibri"/>
+            </a:endParaRPr>
+          </a:p>
+        </p:txBody>
+      </p:sp>
       <p:cxnSp>
         <p:nvCxnSpPr>
-          <p:cNvPr id="27" name="Прямая со стрелкой 26">
-            <a:extLst>
-              <a:ext uri="{FF2B5EF4-FFF2-40B4-BE49-F238E27FC236}">
-                <a16:creationId xmlns:a16="http://schemas.microsoft.com/office/drawing/2014/main" id="{6A325E1A-7144-4F26-A3A4-611ED2B82850}"/>
+          <p:cNvPr id="39" name="Прямая со стрелкой 38">
+            <a:extLst>
+              <a:ext uri="{FF2B5EF4-FFF2-40B4-BE49-F238E27FC236}">
+                <a16:creationId xmlns:a16="http://schemas.microsoft.com/office/drawing/2014/main" id="{A6FA87C2-5C47-44E2-8974-99AEB34A3203}"/>
               </a:ext>
             </a:extLst>
           </p:cNvPr>
@@ -8462,15 +8530,15 @@
         </p:nvCxnSpPr>
         <p:spPr>
           <a:xfrm>
-            <a:off x="1485900" y="2857500"/>
-            <a:ext cx="914400" cy="571500"/>
+            <a:off x="1485900" y="3111500"/>
+            <a:ext cx="12700" cy="571500"/>
           </a:xfrm>
           <a:prstGeom prst="straightConnector1">
             <a:avLst/>
           </a:prstGeom>
-          <a:ln w="15875" cap="flat" cmpd="sng" algn="ctr">
+          <a:ln w="12700" cap="flat" cmpd="sng" algn="ctr">
             <a:solidFill>
-              <a:srgbClr val="636E80"/>
+              <a:srgbClr val="6B7B8C"/>
             </a:solidFill>
             <a:prstDash val="solid"/>
             <a:miter lim="800000"/>
@@ -8493,10 +8561,10 @@
       </p:cxnSp>
       <p:cxnSp>
         <p:nvCxnSpPr>
-          <p:cNvPr id="28" name="Прямая со стрелкой 27">
-            <a:extLst>
-              <a:ext uri="{FF2B5EF4-FFF2-40B4-BE49-F238E27FC236}">
-                <a16:creationId xmlns:a16="http://schemas.microsoft.com/office/drawing/2014/main" id="{428A23FC-EAEE-4E5C-B5ED-CECFAFCE6DC0}"/>
+          <p:cNvPr id="40" name="Прямая со стрелкой 39">
+            <a:extLst>
+              <a:ext uri="{FF2B5EF4-FFF2-40B4-BE49-F238E27FC236}">
+                <a16:creationId xmlns:a16="http://schemas.microsoft.com/office/drawing/2014/main" id="{0B358F2B-CA41-41B8-8E7F-9D7E9E477DF9}"/>
               </a:ext>
             </a:extLst>
           </p:cNvPr>
@@ -8505,15 +8573,15 @@
         </p:nvCxnSpPr>
         <p:spPr>
           <a:xfrm>
-            <a:off x="3797300" y="2857500"/>
-            <a:ext cx="2324100" cy="571500"/>
+            <a:off x="6121400" y="3111500"/>
+            <a:ext cx="12700" cy="279400"/>
           </a:xfrm>
           <a:prstGeom prst="straightConnector1">
             <a:avLst/>
           </a:prstGeom>
-          <a:ln w="15875" cap="flat" cmpd="sng" algn="ctr">
+          <a:ln w="12700" cap="flat" cmpd="sng" algn="ctr">
             <a:solidFill>
-              <a:srgbClr val="636E80"/>
+              <a:srgbClr val="6B7B8C"/>
             </a:solidFill>
             <a:prstDash val="solid"/>
             <a:miter lim="800000"/>
@@ -8534,60 +8602,178 @@
           </a:fontRef>
         </p:style>
       </p:cxnSp>
-      <p:sp>
-        <p:nvSpPr>
-          <p:cNvPr id="35" name="TextBox 34">
-            <a:extLst>
-              <a:ext uri="{FF2B5EF4-FFF2-40B4-BE49-F238E27FC236}">
-                <a16:creationId xmlns:a16="http://schemas.microsoft.com/office/drawing/2014/main" id="{6315EC14-10AB-433B-98C9-F40C976AB17A}"/>
-              </a:ext>
-            </a:extLst>
-          </p:cNvPr>
-          <p:cNvSpPr txBox="1"/>
+      <p:cxnSp>
+        <p:nvCxnSpPr>
+          <p:cNvPr id="41" name="Прямая со стрелкой 40">
+            <a:extLst>
+              <a:ext uri="{FF2B5EF4-FFF2-40B4-BE49-F238E27FC236}">
+                <a16:creationId xmlns:a16="http://schemas.microsoft.com/office/drawing/2014/main" id="{BF98EF44-AFFA-4934-93DB-1D561F62FE0F}"/>
+              </a:ext>
+            </a:extLst>
+          </p:cNvPr>
+          <p:cNvCxnSpPr/>
           <p:nvPr/>
-        </p:nvSpPr>
+        </p:nvCxnSpPr>
         <p:spPr>
           <a:xfrm>
-            <a:off x="381000" y="4826000"/>
-            <a:ext cx="11430000" cy="304800"/>
+            <a:off x="3797300" y="3390900"/>
+            <a:ext cx="2324100" cy="12700"/>
           </a:xfrm>
-          <a:prstGeom prst="rect">
+          <a:prstGeom prst="straightConnector1">
             <a:avLst/>
           </a:prstGeom>
-          <a:noFill/>
-          <a:ln>
-            <a:noFill/>
+          <a:ln w="12700" cap="flat" cmpd="sng" algn="ctr">
+            <a:solidFill>
+              <a:srgbClr val="6B7B8C"/>
+            </a:solidFill>
+            <a:prstDash val="solid"/>
+            <a:miter lim="800000"/>
           </a:ln>
         </p:spPr>
-        <p:txBody>
-          <a:bodyPr vertOverflow="overflow" vert="horz" wrap="square" rtlCol="0" anchor="t">
-            <a:noAutofit/>
-          </a:bodyPr>
-          <a:lstStyle/>
-          <a:p>
-            <a:pPr algn="l"/>
-            <a:r>
-              <a:rPr lang="en-US" sz="1200" i="1">
-                <a:solidFill>
-                  <a:srgbClr val="636E80"/>
-                </a:solidFill>
-                <a:latin typeface="Calibri"/>
-                <a:ea typeface="Calibri"/>
-                <a:cs typeface="Calibri"/>
-              </a:rPr>
-              <a:t>Сущности из приложений users · companies · tasks · chat · activity</a:t>
-            </a:r>
-            <a:endParaRPr lang="ru-RU" sz="1200" i="1">
-              <a:solidFill>
-                <a:srgbClr val="636E80"/>
-              </a:solidFill>
-              <a:latin typeface="Calibri"/>
-              <a:ea typeface="Calibri"/>
-              <a:cs typeface="Calibri"/>
-            </a:endParaRPr>
-          </a:p>
-        </p:txBody>
-      </p:sp>
+        <p:style>
+          <a:lnRef idx="2">
+            <a:schemeClr val="accent1"/>
+          </a:lnRef>
+          <a:fillRef idx="0">
+            <a:schemeClr val="accent1"/>
+          </a:fillRef>
+          <a:effectRef idx="1">
+            <a:schemeClr val="accent1"/>
+          </a:effectRef>
+          <a:fontRef idx="minor">
+            <a:schemeClr val="tx1"/>
+          </a:fontRef>
+        </p:style>
+      </p:cxnSp>
+      <p:cxnSp>
+        <p:nvCxnSpPr>
+          <p:cNvPr id="42" name="Прямая со стрелкой 41">
+            <a:extLst>
+              <a:ext uri="{FF2B5EF4-FFF2-40B4-BE49-F238E27FC236}">
+                <a16:creationId xmlns:a16="http://schemas.microsoft.com/office/drawing/2014/main" id="{AACD5746-196F-47EB-AF2F-9252D2DC9B99}"/>
+              </a:ext>
+            </a:extLst>
+          </p:cNvPr>
+          <p:cNvCxnSpPr/>
+          <p:nvPr/>
+        </p:nvCxnSpPr>
+        <p:spPr>
+          <a:xfrm>
+            <a:off x="3797300" y="3390900"/>
+            <a:ext cx="12700" cy="292100"/>
+          </a:xfrm>
+          <a:prstGeom prst="straightConnector1">
+            <a:avLst/>
+          </a:prstGeom>
+          <a:ln w="12700" cap="flat" cmpd="sng" algn="ctr">
+            <a:solidFill>
+              <a:srgbClr val="6B7B8C"/>
+            </a:solidFill>
+            <a:prstDash val="solid"/>
+            <a:miter lim="800000"/>
+          </a:ln>
+        </p:spPr>
+        <p:style>
+          <a:lnRef idx="2">
+            <a:schemeClr val="accent1"/>
+          </a:lnRef>
+          <a:fillRef idx="0">
+            <a:schemeClr val="accent1"/>
+          </a:fillRef>
+          <a:effectRef idx="1">
+            <a:schemeClr val="accent1"/>
+          </a:effectRef>
+          <a:fontRef idx="minor">
+            <a:schemeClr val="tx1"/>
+          </a:fontRef>
+        </p:style>
+      </p:cxnSp>
+      <p:cxnSp>
+        <p:nvCxnSpPr>
+          <p:cNvPr id="43" name="Прямая со стрелкой 42">
+            <a:extLst>
+              <a:ext uri="{FF2B5EF4-FFF2-40B4-BE49-F238E27FC236}">
+                <a16:creationId xmlns:a16="http://schemas.microsoft.com/office/drawing/2014/main" id="{EE54C916-BDAA-458A-B92D-202653010D61}"/>
+              </a:ext>
+            </a:extLst>
+          </p:cNvPr>
+          <p:cNvCxnSpPr/>
+          <p:nvPr/>
+        </p:nvCxnSpPr>
+        <p:spPr>
+          <a:xfrm>
+            <a:off x="6121400" y="3111500"/>
+            <a:ext cx="12700" cy="571500"/>
+          </a:xfrm>
+          <a:prstGeom prst="straightConnector1">
+            <a:avLst/>
+          </a:prstGeom>
+          <a:ln w="12700" cap="flat" cmpd="sng" algn="ctr">
+            <a:solidFill>
+              <a:srgbClr val="6B7B8C"/>
+            </a:solidFill>
+            <a:prstDash val="solid"/>
+            <a:miter lim="800000"/>
+          </a:ln>
+        </p:spPr>
+        <p:style>
+          <a:lnRef idx="2">
+            <a:schemeClr val="accent1"/>
+          </a:lnRef>
+          <a:fillRef idx="0">
+            <a:schemeClr val="accent1"/>
+          </a:fillRef>
+          <a:effectRef idx="1">
+            <a:schemeClr val="accent1"/>
+          </a:effectRef>
+          <a:fontRef idx="minor">
+            <a:schemeClr val="tx1"/>
+          </a:fontRef>
+        </p:style>
+      </p:cxnSp>
+      <p:cxnSp>
+        <p:nvCxnSpPr>
+          <p:cNvPr id="44" name="Прямая со стрелкой 43">
+            <a:extLst>
+              <a:ext uri="{FF2B5EF4-FFF2-40B4-BE49-F238E27FC236}">
+                <a16:creationId xmlns:a16="http://schemas.microsoft.com/office/drawing/2014/main" id="{22BA55F1-2311-4133-8628-7283BAB5A919}"/>
+              </a:ext>
+            </a:extLst>
+          </p:cNvPr>
+          <p:cNvCxnSpPr/>
+          <p:nvPr/>
+        </p:nvCxnSpPr>
+        <p:spPr>
+          <a:xfrm>
+            <a:off x="10693400" y="3111500"/>
+            <a:ext cx="12700" cy="571500"/>
+          </a:xfrm>
+          <a:prstGeom prst="straightConnector1">
+            <a:avLst/>
+          </a:prstGeom>
+          <a:ln w="12700" cap="flat" cmpd="sng" algn="ctr">
+            <a:solidFill>
+              <a:srgbClr val="6B7B8C"/>
+            </a:solidFill>
+            <a:prstDash val="solid"/>
+            <a:miter lim="800000"/>
+          </a:ln>
+        </p:spPr>
+        <p:style>
+          <a:lnRef idx="2">
+            <a:schemeClr val="accent1"/>
+          </a:lnRef>
+          <a:fillRef idx="0">
+            <a:schemeClr val="accent1"/>
+          </a:fillRef>
+          <a:effectRef idx="1">
+            <a:schemeClr val="accent1"/>
+          </a:effectRef>
+          <a:fontRef idx="minor">
+            <a:schemeClr val="tx1"/>
+          </a:fontRef>
+        </p:style>
+      </p:cxnSp>
     </p:spTree>
     <p:extLst>
       <p:ext uri="{BB962C8B-B14F-4D97-AF65-F5344CB8AC3E}">
@@ -8649,7 +8835,7 @@
                 </a:solidFill>
                 <a:latin typeface="Cambria"/>
               </a:rPr>
-              <a:t>Роли и мультитенантность</a:t>
+              <a:t>Роли и работа в нескольких компаниях</a:t>
             </a:r>
           </a:p>
         </p:txBody>
@@ -8901,7 +9087,7 @@
                 </a:solidFill>
                 <a:latin typeface="Calibri"/>
               </a:rPr>
-              <a:t>Custom-роли — гибкий набор разрешений под нужды команды</a:t>
+              <a:t>Настраиваемые роли — гибкий набор разрешений под нужды команды</a:t>
             </a:r>
           </a:p>
         </p:txBody>
@@ -8909,7 +9095,7 @@
     </p:spTree>
     <p:extLst>
       <p:ext uri="{BB962C8B-B14F-4D97-AF65-F5344CB8AC3E}">
-        <p14:creationId xmlns:p14="http://schemas.microsoft.com/office/powerpoint/2010/main" val="3215125585"/>
+        <p14:creationId xmlns:p14="http://schemas.microsoft.com/office/powerpoint/2010/main" val="3991771880"/>
       </p:ext>
     </p:extLst>
   </p:cSld>
